--- a/시스템 기획/아웃배틀 옵션/자료/그래픽.pptx
+++ b/시스템 기획/아웃배틀 옵션/자료/그래픽.pptx
@@ -259,7 +259,7 @@
           <a:p>
             <a:fld id="{DA2F05AD-DC08-4F6C-9164-0EAD3A5E84DB}" type="datetimeFigureOut">
               <a:rPr lang="ko-KR" altLang="en-US" smtClean="0"/>
-              <a:t>2025-10-10</a:t>
+              <a:t>2025-10-16</a:t>
             </a:fld>
             <a:endParaRPr lang="ko-KR" altLang="en-US"/>
           </a:p>
@@ -457,7 +457,7 @@
           <a:p>
             <a:fld id="{DA2F05AD-DC08-4F6C-9164-0EAD3A5E84DB}" type="datetimeFigureOut">
               <a:rPr lang="ko-KR" altLang="en-US" smtClean="0"/>
-              <a:t>2025-10-10</a:t>
+              <a:t>2025-10-16</a:t>
             </a:fld>
             <a:endParaRPr lang="ko-KR" altLang="en-US"/>
           </a:p>
@@ -665,7 +665,7 @@
           <a:p>
             <a:fld id="{DA2F05AD-DC08-4F6C-9164-0EAD3A5E84DB}" type="datetimeFigureOut">
               <a:rPr lang="ko-KR" altLang="en-US" smtClean="0"/>
-              <a:t>2025-10-10</a:t>
+              <a:t>2025-10-16</a:t>
             </a:fld>
             <a:endParaRPr lang="ko-KR" altLang="en-US"/>
           </a:p>
@@ -863,7 +863,7 @@
           <a:p>
             <a:fld id="{DA2F05AD-DC08-4F6C-9164-0EAD3A5E84DB}" type="datetimeFigureOut">
               <a:rPr lang="ko-KR" altLang="en-US" smtClean="0"/>
-              <a:t>2025-10-10</a:t>
+              <a:t>2025-10-16</a:t>
             </a:fld>
             <a:endParaRPr lang="ko-KR" altLang="en-US"/>
           </a:p>
@@ -1138,7 +1138,7 @@
           <a:p>
             <a:fld id="{DA2F05AD-DC08-4F6C-9164-0EAD3A5E84DB}" type="datetimeFigureOut">
               <a:rPr lang="ko-KR" altLang="en-US" smtClean="0"/>
-              <a:t>2025-10-10</a:t>
+              <a:t>2025-10-16</a:t>
             </a:fld>
             <a:endParaRPr lang="ko-KR" altLang="en-US"/>
           </a:p>
@@ -1403,7 +1403,7 @@
           <a:p>
             <a:fld id="{DA2F05AD-DC08-4F6C-9164-0EAD3A5E84DB}" type="datetimeFigureOut">
               <a:rPr lang="ko-KR" altLang="en-US" smtClean="0"/>
-              <a:t>2025-10-10</a:t>
+              <a:t>2025-10-16</a:t>
             </a:fld>
             <a:endParaRPr lang="ko-KR" altLang="en-US"/>
           </a:p>
@@ -1815,7 +1815,7 @@
           <a:p>
             <a:fld id="{DA2F05AD-DC08-4F6C-9164-0EAD3A5E84DB}" type="datetimeFigureOut">
               <a:rPr lang="ko-KR" altLang="en-US" smtClean="0"/>
-              <a:t>2025-10-10</a:t>
+              <a:t>2025-10-16</a:t>
             </a:fld>
             <a:endParaRPr lang="ko-KR" altLang="en-US"/>
           </a:p>
@@ -1956,7 +1956,7 @@
           <a:p>
             <a:fld id="{DA2F05AD-DC08-4F6C-9164-0EAD3A5E84DB}" type="datetimeFigureOut">
               <a:rPr lang="ko-KR" altLang="en-US" smtClean="0"/>
-              <a:t>2025-10-10</a:t>
+              <a:t>2025-10-16</a:t>
             </a:fld>
             <a:endParaRPr lang="ko-KR" altLang="en-US"/>
           </a:p>
@@ -2069,7 +2069,7 @@
           <a:p>
             <a:fld id="{DA2F05AD-DC08-4F6C-9164-0EAD3A5E84DB}" type="datetimeFigureOut">
               <a:rPr lang="ko-KR" altLang="en-US" smtClean="0"/>
-              <a:t>2025-10-10</a:t>
+              <a:t>2025-10-16</a:t>
             </a:fld>
             <a:endParaRPr lang="ko-KR" altLang="en-US"/>
           </a:p>
@@ -2380,7 +2380,7 @@
           <a:p>
             <a:fld id="{DA2F05AD-DC08-4F6C-9164-0EAD3A5E84DB}" type="datetimeFigureOut">
               <a:rPr lang="ko-KR" altLang="en-US" smtClean="0"/>
-              <a:t>2025-10-10</a:t>
+              <a:t>2025-10-16</a:t>
             </a:fld>
             <a:endParaRPr lang="ko-KR" altLang="en-US"/>
           </a:p>
@@ -2668,7 +2668,7 @@
           <a:p>
             <a:fld id="{DA2F05AD-DC08-4F6C-9164-0EAD3A5E84DB}" type="datetimeFigureOut">
               <a:rPr lang="ko-KR" altLang="en-US" smtClean="0"/>
-              <a:t>2025-10-10</a:t>
+              <a:t>2025-10-16</a:t>
             </a:fld>
             <a:endParaRPr lang="ko-KR" altLang="en-US"/>
           </a:p>
@@ -2909,7 +2909,7 @@
           <a:p>
             <a:fld id="{DA2F05AD-DC08-4F6C-9164-0EAD3A5E84DB}" type="datetimeFigureOut">
               <a:rPr lang="ko-KR" altLang="en-US" smtClean="0"/>
-              <a:t>2025-10-10</a:t>
+              <a:t>2025-10-16</a:t>
             </a:fld>
             <a:endParaRPr lang="ko-KR" altLang="en-US"/>
           </a:p>
@@ -3475,10 +3475,10 @@
       </p:pic>
       <p:sp>
         <p:nvSpPr>
-          <p:cNvPr id="14" name="자유형: 도형 13">
-            <a:extLst>
-              <a:ext uri="{FF2B5EF4-FFF2-40B4-BE49-F238E27FC236}">
-                <a16:creationId xmlns:a16="http://schemas.microsoft.com/office/drawing/2014/main" id="{A8FFBAA2-E571-2793-9753-EF6605149D6C}"/>
+          <p:cNvPr id="20" name="타원 19">
+            <a:extLst>
+              <a:ext uri="{FF2B5EF4-FFF2-40B4-BE49-F238E27FC236}">
+                <a16:creationId xmlns:a16="http://schemas.microsoft.com/office/drawing/2014/main" id="{0BF9059B-486B-B60E-E209-C5C607C198EB}"/>
               </a:ext>
             </a:extLst>
           </p:cNvPr>
@@ -3487,139 +3487,7 @@
         </p:nvSpPr>
         <p:spPr>
           <a:xfrm>
-            <a:off x="1900934" y="1052945"/>
-            <a:ext cx="697938" cy="1531924"/>
-          </a:xfrm>
-          <a:custGeom>
-            <a:avLst/>
-            <a:gdLst>
-              <a:gd name="connsiteX0" fmla="*/ 581168 w 697938"/>
-              <a:gd name="connsiteY0" fmla="*/ 0 h 2537606"/>
-              <a:gd name="connsiteX1" fmla="*/ 73168 w 697938"/>
-              <a:gd name="connsiteY1" fmla="*/ 997528 h 2537606"/>
-              <a:gd name="connsiteX2" fmla="*/ 73168 w 697938"/>
-              <a:gd name="connsiteY2" fmla="*/ 997528 h 2537606"/>
-              <a:gd name="connsiteX3" fmla="*/ 36223 w 697938"/>
-              <a:gd name="connsiteY3" fmla="*/ 1634837 h 2537606"/>
-              <a:gd name="connsiteX4" fmla="*/ 655059 w 697938"/>
-              <a:gd name="connsiteY4" fmla="*/ 2475346 h 2537606"/>
-              <a:gd name="connsiteX5" fmla="*/ 645823 w 697938"/>
-              <a:gd name="connsiteY5" fmla="*/ 2475346 h 2537606"/>
-              <a:gd name="connsiteX6" fmla="*/ 645823 w 697938"/>
-              <a:gd name="connsiteY6" fmla="*/ 2475346 h 2537606"/>
-              <a:gd name="connsiteX7" fmla="*/ 645823 w 697938"/>
-              <a:gd name="connsiteY7" fmla="*/ 2475346 h 2537606"/>
-            </a:gdLst>
-            <a:ahLst/>
-            <a:cxnLst>
-              <a:cxn ang="0">
-                <a:pos x="connsiteX0" y="connsiteY0"/>
-              </a:cxn>
-              <a:cxn ang="0">
-                <a:pos x="connsiteX1" y="connsiteY1"/>
-              </a:cxn>
-              <a:cxn ang="0">
-                <a:pos x="connsiteX2" y="connsiteY2"/>
-              </a:cxn>
-              <a:cxn ang="0">
-                <a:pos x="connsiteX3" y="connsiteY3"/>
-              </a:cxn>
-              <a:cxn ang="0">
-                <a:pos x="connsiteX4" y="connsiteY4"/>
-              </a:cxn>
-              <a:cxn ang="0">
-                <a:pos x="connsiteX5" y="connsiteY5"/>
-              </a:cxn>
-              <a:cxn ang="0">
-                <a:pos x="connsiteX6" y="connsiteY6"/>
-              </a:cxn>
-              <a:cxn ang="0">
-                <a:pos x="connsiteX7" y="connsiteY7"/>
-              </a:cxn>
-            </a:cxnLst>
-            <a:rect l="l" t="t" r="r" b="b"/>
-            <a:pathLst>
-              <a:path w="697938" h="2537606">
-                <a:moveTo>
-                  <a:pt x="581168" y="0"/>
-                </a:moveTo>
-                <a:lnTo>
-                  <a:pt x="73168" y="997528"/>
-                </a:lnTo>
-                <a:lnTo>
-                  <a:pt x="73168" y="997528"/>
-                </a:lnTo>
-                <a:cubicBezTo>
-                  <a:pt x="67011" y="1103746"/>
-                  <a:pt x="-60759" y="1388534"/>
-                  <a:pt x="36223" y="1634837"/>
-                </a:cubicBezTo>
-                <a:cubicBezTo>
-                  <a:pt x="133205" y="1881140"/>
-                  <a:pt x="655059" y="2475346"/>
-                  <a:pt x="655059" y="2475346"/>
-                </a:cubicBezTo>
-                <a:cubicBezTo>
-                  <a:pt x="756659" y="2615431"/>
-                  <a:pt x="645823" y="2475346"/>
-                  <a:pt x="645823" y="2475346"/>
-                </a:cubicBezTo>
-                <a:lnTo>
-                  <a:pt x="645823" y="2475346"/>
-                </a:lnTo>
-                <a:lnTo>
-                  <a:pt x="645823" y="2475346"/>
-                </a:lnTo>
-              </a:path>
-            </a:pathLst>
-          </a:custGeom>
-          <a:noFill/>
-          <a:ln>
-            <a:solidFill>
-              <a:schemeClr val="tx1"/>
-            </a:solidFill>
-          </a:ln>
-        </p:spPr>
-        <p:style>
-          <a:lnRef idx="2">
-            <a:schemeClr val="accent1">
-              <a:shade val="15000"/>
-            </a:schemeClr>
-          </a:lnRef>
-          <a:fillRef idx="1">
-            <a:schemeClr val="accent1"/>
-          </a:fillRef>
-          <a:effectRef idx="0">
-            <a:schemeClr val="accent1"/>
-          </a:effectRef>
-          <a:fontRef idx="minor">
-            <a:schemeClr val="lt1"/>
-          </a:fontRef>
-        </p:style>
-        <p:txBody>
-          <a:bodyPr rtlCol="0" anchor="ctr"/>
-          <a:lstStyle/>
-          <a:p>
-            <a:pPr algn="ctr"/>
-            <a:endParaRPr lang="ko-KR" altLang="en-US"/>
-          </a:p>
-        </p:txBody>
-      </p:sp>
-      <p:sp>
-        <p:nvSpPr>
-          <p:cNvPr id="20" name="타원 19">
-            <a:extLst>
-              <a:ext uri="{FF2B5EF4-FFF2-40B4-BE49-F238E27FC236}">
-                <a16:creationId xmlns:a16="http://schemas.microsoft.com/office/drawing/2014/main" id="{0BF9059B-486B-B60E-E209-C5C607C198EB}"/>
-              </a:ext>
-            </a:extLst>
-          </p:cNvPr>
-          <p:cNvSpPr/>
-          <p:nvPr/>
-        </p:nvSpPr>
-        <p:spPr>
-          <a:xfrm>
-            <a:off x="1414056" y="1531431"/>
+            <a:off x="1205205" y="989247"/>
             <a:ext cx="738909" cy="720437"/>
           </a:xfrm>
           <a:prstGeom prst="ellipse">
@@ -3657,10 +3525,10 @@
       </p:sp>
       <p:pic>
         <p:nvPicPr>
-          <p:cNvPr id="15" name="그림 14" descr="Toggle button design: the full run through - Justinmind">
-            <a:extLst>
-              <a:ext uri="{FF2B5EF4-FFF2-40B4-BE49-F238E27FC236}">
-                <a16:creationId xmlns:a16="http://schemas.microsoft.com/office/drawing/2014/main" id="{D8D328CC-9387-98E0-DBD2-8F686B52224E}"/>
+          <p:cNvPr id="21" name="그림 20" descr="Dropdown menu design: UX best practices">
+            <a:extLst>
+              <a:ext uri="{FF2B5EF4-FFF2-40B4-BE49-F238E27FC236}">
+                <a16:creationId xmlns:a16="http://schemas.microsoft.com/office/drawing/2014/main" id="{1440B095-518A-5A31-762D-C1E9EE99596E}"/>
               </a:ext>
             </a:extLst>
           </p:cNvPr>
@@ -3670,202 +3538,7 @@
           <p:nvPr/>
         </p:nvPicPr>
         <p:blipFill rotWithShape="1">
-          <a:blip r:embed="rId3">
-            <a:extLst>
-              <a:ext uri="{28A0092B-C50C-407E-A947-70E740481C1C}">
-                <a14:useLocalDpi xmlns:a14="http://schemas.microsoft.com/office/drawing/2010/main" val="0"/>
-              </a:ext>
-            </a:extLst>
-          </a:blip>
-          <a:srcRect l="21569" t="6324" r="56861" b="64192"/>
-          <a:stretch/>
-        </p:blipFill>
-        <p:spPr bwMode="auto">
-          <a:xfrm>
-            <a:off x="4268413" y="2868002"/>
-            <a:ext cx="1433512" cy="914400"/>
-          </a:xfrm>
-          <a:prstGeom prst="rect">
-            <a:avLst/>
-          </a:prstGeom>
-          <a:noFill/>
-          <a:ln>
-            <a:noFill/>
-          </a:ln>
-          <a:extLst>
-            <a:ext uri="{53640926-AAD7-44D8-BBD7-CCE9431645EC}">
-              <a14:shadowObscured xmlns:a14="http://schemas.microsoft.com/office/drawing/2010/main"/>
-            </a:ext>
-          </a:extLst>
-        </p:spPr>
-      </p:pic>
-      <p:grpSp>
-        <p:nvGrpSpPr>
-          <p:cNvPr id="16" name="그룹 15">
-            <a:extLst>
-              <a:ext uri="{FF2B5EF4-FFF2-40B4-BE49-F238E27FC236}">
-                <a16:creationId xmlns:a16="http://schemas.microsoft.com/office/drawing/2014/main" id="{F08E6B3F-0B51-F93D-F640-84BAD17B3455}"/>
-              </a:ext>
-            </a:extLst>
-          </p:cNvPr>
-          <p:cNvGrpSpPr/>
-          <p:nvPr/>
-        </p:nvGrpSpPr>
-        <p:grpSpPr>
-          <a:xfrm>
-            <a:off x="2481279" y="1955200"/>
-            <a:ext cx="1625602" cy="629669"/>
-            <a:chOff x="4572000" y="1662545"/>
-            <a:chExt cx="3001818" cy="629669"/>
-          </a:xfrm>
-        </p:grpSpPr>
-        <p:sp>
-          <p:nvSpPr>
-            <p:cNvPr id="17" name="순서도: 처리 16">
-              <a:extLst>
-                <a:ext uri="{FF2B5EF4-FFF2-40B4-BE49-F238E27FC236}">
-                  <a16:creationId xmlns:a16="http://schemas.microsoft.com/office/drawing/2014/main" id="{F405A8D0-A606-DDF1-1C69-2CB989B8FF2D}"/>
-                </a:ext>
-              </a:extLst>
-            </p:cNvPr>
-            <p:cNvSpPr/>
-            <p:nvPr/>
-          </p:nvSpPr>
-          <p:spPr>
-            <a:xfrm>
-              <a:off x="4572000" y="1662545"/>
-              <a:ext cx="3001818" cy="629669"/>
-            </a:xfrm>
-            <a:prstGeom prst="flowChartProcess">
-              <a:avLst/>
-            </a:prstGeom>
-          </p:spPr>
-          <p:style>
-            <a:lnRef idx="2">
-              <a:schemeClr val="accent1">
-                <a:shade val="15000"/>
-              </a:schemeClr>
-            </a:lnRef>
-            <a:fillRef idx="1">
-              <a:schemeClr val="accent1"/>
-            </a:fillRef>
-            <a:effectRef idx="0">
-              <a:schemeClr val="accent1"/>
-            </a:effectRef>
-            <a:fontRef idx="minor">
-              <a:schemeClr val="lt1"/>
-            </a:fontRef>
-          </p:style>
-          <p:txBody>
-            <a:bodyPr rtlCol="0" anchor="ctr"/>
-            <a:lstStyle/>
-            <a:p>
-              <a:pPr algn="ctr"/>
-              <a:endParaRPr lang="ko-KR" altLang="en-US"/>
-            </a:p>
-          </p:txBody>
-        </p:sp>
-        <p:sp>
-          <p:nvSpPr>
-            <p:cNvPr id="18" name="TextBox 17">
-              <a:extLst>
-                <a:ext uri="{FF2B5EF4-FFF2-40B4-BE49-F238E27FC236}">
-                  <a16:creationId xmlns:a16="http://schemas.microsoft.com/office/drawing/2014/main" id="{89BD6253-01CA-740A-B930-517E5B816A74}"/>
-                </a:ext>
-              </a:extLst>
-            </p:cNvPr>
-            <p:cNvSpPr txBox="1"/>
-            <p:nvPr/>
-          </p:nvSpPr>
-          <p:spPr>
-            <a:xfrm>
-              <a:off x="4723939" y="1792713"/>
-              <a:ext cx="2752436" cy="369332"/>
-            </a:xfrm>
-            <a:prstGeom prst="rect">
-              <a:avLst/>
-            </a:prstGeom>
-            <a:noFill/>
-          </p:spPr>
-          <p:txBody>
-            <a:bodyPr wrap="square" rtlCol="0">
-              <a:spAutoFit/>
-            </a:bodyPr>
-            <a:lstStyle/>
-            <a:p>
-              <a:pPr algn="ctr"/>
-              <a:r>
-                <a:rPr lang="en-US" altLang="ko-KR"/>
-                <a:t>UI </a:t>
-              </a:r>
-              <a:r>
-                <a:rPr lang="ko-KR" altLang="en-US"/>
-                <a:t>스케일</a:t>
-              </a:r>
-            </a:p>
-          </p:txBody>
-        </p:sp>
-      </p:grpSp>
-      <p:pic>
-        <p:nvPicPr>
-          <p:cNvPr id="19" name="그림 18" descr="슬라이더 UI는 언제 사용해야 하는가?">
-            <a:extLst>
-              <a:ext uri="{FF2B5EF4-FFF2-40B4-BE49-F238E27FC236}">
-                <a16:creationId xmlns:a16="http://schemas.microsoft.com/office/drawing/2014/main" id="{1A2015FD-A0DE-26E1-4481-A8609E5FB530}"/>
-              </a:ext>
-            </a:extLst>
-          </p:cNvPr>
-          <p:cNvPicPr>
-            <a:picLocks noChangeAspect="1"/>
-          </p:cNvPicPr>
-          <p:nvPr/>
-        </p:nvPicPr>
-        <p:blipFill rotWithShape="1">
-          <a:blip r:embed="rId2">
-            <a:extLst>
-              <a:ext uri="{28A0092B-C50C-407E-A947-70E740481C1C}">
-                <a14:useLocalDpi xmlns:a14="http://schemas.microsoft.com/office/drawing/2010/main" val="0"/>
-              </a:ext>
-            </a:extLst>
-          </a:blip>
-          <a:srcRect t="39567" b="38727"/>
-          <a:stretch/>
-        </p:blipFill>
-        <p:spPr bwMode="auto">
-          <a:xfrm>
-            <a:off x="4442303" y="1999764"/>
-            <a:ext cx="3891915" cy="540543"/>
-          </a:xfrm>
-          <a:prstGeom prst="rect">
-            <a:avLst/>
-          </a:prstGeom>
-          <a:noFill/>
-          <a:ln>
-            <a:noFill/>
-          </a:ln>
-          <a:extLst>
-            <a:ext uri="{53640926-AAD7-44D8-BBD7-CCE9431645EC}">
-              <a14:shadowObscured xmlns:a14="http://schemas.microsoft.com/office/drawing/2010/main"/>
-            </a:ext>
-          </a:extLst>
-        </p:spPr>
-      </p:pic>
-      <p:pic>
-        <p:nvPicPr>
-          <p:cNvPr id="21" name="그림 20" descr="Dropdown menu design: UX best practices">
-            <a:extLst>
-              <a:ext uri="{FF2B5EF4-FFF2-40B4-BE49-F238E27FC236}">
-                <a16:creationId xmlns:a16="http://schemas.microsoft.com/office/drawing/2014/main" id="{1440B095-518A-5A31-762D-C1E9EE99596E}"/>
-              </a:ext>
-            </a:extLst>
-          </p:cNvPr>
-          <p:cNvPicPr>
-            <a:picLocks noChangeAspect="1"/>
-          </p:cNvPicPr>
-          <p:nvPr/>
-        </p:nvPicPr>
-        <p:blipFill rotWithShape="1">
-          <a:blip r:embed="rId4" cstate="print">
+          <a:blip r:embed="rId3" cstate="print">
             <a:extLst>
               <a:ext uri="{28A0092B-C50C-407E-A947-70E740481C1C}">
                 <a14:useLocalDpi xmlns:a14="http://schemas.microsoft.com/office/drawing/2010/main" val="0"/>
@@ -3877,7 +3550,7 @@
         </p:blipFill>
         <p:spPr bwMode="auto">
           <a:xfrm>
-            <a:off x="7660131" y="3122174"/>
+            <a:off x="8281979" y="2045254"/>
             <a:ext cx="2028825" cy="1529715"/>
           </a:xfrm>
           <a:prstGeom prst="rect">
@@ -3908,7 +3581,7 @@
         </p:nvGrpSpPr>
         <p:grpSpPr>
           <a:xfrm>
-            <a:off x="2503044" y="3010368"/>
+            <a:off x="2503044" y="1975896"/>
             <a:ext cx="1625602" cy="629669"/>
             <a:chOff x="4572000" y="1662545"/>
             <a:chExt cx="3001818" cy="629669"/>
@@ -4011,7 +3684,7 @@
         </p:nvGrpSpPr>
         <p:grpSpPr>
           <a:xfrm>
-            <a:off x="5868227" y="3015982"/>
+            <a:off x="6490075" y="1939062"/>
             <a:ext cx="1625602" cy="629669"/>
             <a:chOff x="4572000" y="1662545"/>
             <a:chExt cx="3001818" cy="629669"/>
@@ -4116,7 +3789,7 @@
         </p:nvCxnSpPr>
         <p:spPr>
           <a:xfrm>
-            <a:off x="1900934" y="3232727"/>
+            <a:off x="1900934" y="2198255"/>
             <a:ext cx="602110" cy="92476"/>
           </a:xfrm>
           <a:prstGeom prst="line">
@@ -4157,7 +3830,7 @@
         </p:nvSpPr>
         <p:spPr>
           <a:xfrm>
-            <a:off x="1154487" y="2919600"/>
+            <a:off x="1154487" y="1885128"/>
             <a:ext cx="738909" cy="720437"/>
           </a:xfrm>
           <a:prstGeom prst="ellipse">
@@ -4192,6 +3865,93 @@
           </a:p>
         </p:txBody>
       </p:sp>
+      <p:cxnSp>
+        <p:nvCxnSpPr>
+          <p:cNvPr id="3" name="직선 연결선 2">
+            <a:extLst>
+              <a:ext uri="{FF2B5EF4-FFF2-40B4-BE49-F238E27FC236}">
+                <a16:creationId xmlns:a16="http://schemas.microsoft.com/office/drawing/2014/main" id="{85775004-AA07-31D0-5683-48CBE8323CF7}"/>
+              </a:ext>
+            </a:extLst>
+          </p:cNvPr>
+          <p:cNvCxnSpPr>
+            <a:cxnSpLocks/>
+          </p:cNvCxnSpPr>
+          <p:nvPr/>
+        </p:nvCxnSpPr>
+        <p:spPr>
+          <a:xfrm>
+            <a:off x="1893396" y="1349466"/>
+            <a:ext cx="595421" cy="0"/>
+          </a:xfrm>
+          <a:prstGeom prst="line">
+            <a:avLst/>
+          </a:prstGeom>
+          <a:ln>
+            <a:solidFill>
+              <a:schemeClr val="tx1"/>
+            </a:solidFill>
+          </a:ln>
+        </p:spPr>
+        <p:style>
+          <a:lnRef idx="1">
+            <a:schemeClr val="accent1"/>
+          </a:lnRef>
+          <a:fillRef idx="0">
+            <a:schemeClr val="accent1"/>
+          </a:fillRef>
+          <a:effectRef idx="0">
+            <a:schemeClr val="accent1"/>
+          </a:effectRef>
+          <a:fontRef idx="minor">
+            <a:schemeClr val="tx1"/>
+          </a:fontRef>
+        </p:style>
+      </p:cxnSp>
+      <p:pic>
+        <p:nvPicPr>
+          <p:cNvPr id="9" name="그림 8" descr="Dropdown menu design: UX best practices">
+            <a:extLst>
+              <a:ext uri="{FF2B5EF4-FFF2-40B4-BE49-F238E27FC236}">
+                <a16:creationId xmlns:a16="http://schemas.microsoft.com/office/drawing/2014/main" id="{859A137D-B280-6EAD-BFBF-23A681630620}"/>
+              </a:ext>
+            </a:extLst>
+          </p:cNvPr>
+          <p:cNvPicPr>
+            <a:picLocks noChangeAspect="1"/>
+          </p:cNvPicPr>
+          <p:nvPr/>
+        </p:nvPicPr>
+        <p:blipFill rotWithShape="1">
+          <a:blip r:embed="rId3" cstate="print">
+            <a:extLst>
+              <a:ext uri="{28A0092B-C50C-407E-A947-70E740481C1C}">
+                <a14:useLocalDpi xmlns:a14="http://schemas.microsoft.com/office/drawing/2010/main" val="0"/>
+              </a:ext>
+            </a:extLst>
+          </a:blip>
+          <a:srcRect l="20352" t="17441" r="20743" b="15806"/>
+          <a:stretch/>
+        </p:blipFill>
+        <p:spPr bwMode="auto">
+          <a:xfrm>
+            <a:off x="4294948" y="1975896"/>
+            <a:ext cx="2028825" cy="1529715"/>
+          </a:xfrm>
+          <a:prstGeom prst="rect">
+            <a:avLst/>
+          </a:prstGeom>
+          <a:noFill/>
+          <a:ln>
+            <a:noFill/>
+          </a:ln>
+          <a:extLst>
+            <a:ext uri="{53640926-AAD7-44D8-BBD7-CCE9431645EC}">
+              <a14:shadowObscured xmlns:a14="http://schemas.microsoft.com/office/drawing/2010/main"/>
+            </a:ext>
+          </a:extLst>
+        </p:spPr>
+      </p:pic>
     </p:spTree>
     <p:extLst>
       <p:ext uri="{BB962C8B-B14F-4D97-AF65-F5344CB8AC3E}">
